--- a/entregaveis/Apresentacao_Consumo_PT_UE.pptx
+++ b/entregaveis/Apresentacao_Consumo_PT_UE.pptx
@@ -1213,7 +1213,7 @@
           <a:lstStyle/>
           <a:p>
             <a:r>
-              <a:t>Cada quadrado vale 1%. Em 2024, 96 de cada 100 empresas de retalho em Portugal eram micro, mas faziam só 24% das vendas. As 97 grandes empresas faziam 44%, abaixo dos 51% da UE. Um mercado menos concentrado deixa espaço para consolidação. Recomendação para Finanças: mapear cadeias regionais e pequenas redes como alvos de parceria ou aquisição. KPI: quota de mercado das cinco maiores.</a:t>
+              <a:t>Cada quadrado vale 1%. Em 2024, 96 de cada 100 empresas de retalho em Portugal eram micro, mas faziam só 24% das vendas. As 97 grandes empresas faziam 44%, abaixo dos 51% da UE. Por curiosidade, a lista mostra algumas das maiores insígnias do retalho em Portugal, pelo volume de negócios do último ano disponível (2024 ou 2025). É uma lista indicativa: os anos não coincidem, Lidl e Aldi são estimativas a partir da quota de mercado, e o valor da Sonae MC e da Worten inclui alguma atividade fora de Portugal. Recomendação para Finanças: mapear cadeias regionais e pequenas redes como alvos de parceria ou aquisição. KPI: quota de mercado das cinco maiores.</a:t>
             </a:r>
           </a:p>
         </p:txBody>
